--- a/decks/hist-civil-rights/hist-civil-rights_ch1_after-slavery.pptx
+++ b/decks/hist-civil-rights/hist-civil-rights_ch1_after-slavery.pptx
@@ -128,30 +128,30 @@
   <p:extLst>
     <p:ext uri="{521415D9-36F7-43E2-AB2F-B90AF26B5E84}">
       <p14:sectionLst xmlns:p14="http://schemas.microsoft.com/office/powerpoint/2010/main">
-        <p14:section name="Opening" id="{9cc0b731-a1b2-f667-74f5-4f8e9b443343}">
+        <p14:section name="Opening" id="{b582da5a-4f2d-ff47-5f08-822b6912f7c6}">
           <p14:sldIdLst>
             <p14:sldId id="256"/>
           </p14:sldIdLst>
         </p14:section>
-        <p14:section name="Gate" id="{94aab764-ea48-f8bc-df8e-afafc8d89e35}">
+        <p14:section name="Gate" id="{2649c7fc-58c5-1669-2bd3-9672a5b1eee8}">
           <p14:sldIdLst>
             <p14:sldId id="257"/>
             <p14:sldId id="258"/>
           </p14:sldIdLst>
         </p14:section>
-        <p14:section name="Pre-teach" id="{1e692105-eb8f-6297-a80b-f07059a1df8e}">
+        <p14:section name="Pre-teach" id="{826ce6c2-7fe6-dcff-7106-512da80b5e97}">
           <p14:sldIdLst>
             <p14:sldId id="259"/>
             <p14:sldId id="260"/>
           </p14:sldIdLst>
         </p14:section>
-        <p14:section name="Read-along" id="{c5126d3c-91bf-5acd-c7b7-14102363fcc9}">
+        <p14:section name="Read-along" id="{ff2e409c-2531-35ba-5591-583f737c555d}">
           <p14:sldIdLst>
             <p14:sldId id="261"/>
             <p14:sldId id="262"/>
           </p14:sldIdLst>
         </p14:section>
-        <p14:section name="Teach" id="{db919704-b747-1bae-89ab-2394f5eec1f0}">
+        <p14:section name="Teach" id="{3306113d-ebf8-9a43-c53b-4e668bbcc32e}">
           <p14:sldIdLst>
             <p14:sldId id="263"/>
             <p14:sldId id="264"/>
@@ -160,7 +160,7 @@
             <p14:sldId id="267"/>
           </p14:sldIdLst>
         </p14:section>
-        <p14:section name="Routes" id="{71689e5f-8713-611c-fe69-5a8d3144b282}">
+        <p14:section name="Routes" id="{7fa99295-d1c5-b5d9-4dc8-7f754c5e0157}">
           <p14:sldIdLst>
             <p14:sldId id="268"/>
             <p14:sldId id="269"/>
@@ -169,12 +169,12 @@
             <p14:sldId id="272"/>
           </p14:sldIdLst>
         </p14:section>
-        <p14:section name="Close" id="{95e15e21-acc6-0df1-2ac5-1cb949a9633e}">
+        <p14:section name="Close" id="{06ce1fa8-8455-cc23-d766-90a4c5e52240}">
           <p14:sldIdLst>
             <p14:sldId id="273"/>
           </p14:sldIdLst>
         </p14:section>
-        <p14:section name="Answers" id="{60318aa2-d6e3-1b74-c603-42079229ef1d}">
+        <p14:section name="Answers" id="{29c3145b-68d9-4ccf-070d-cca80bd2306f}">
           <p14:sldIdLst>
             <p14:sldId id="274"/>
             <p14:sldId id="275"/>
@@ -679,7 +679,7 @@
               <a:rPr lang="en-US" dirty="0"/>
               <a:t>Teach — Why the United States went to war over slavery. Say it in your own words, then check understanding with a quick question: ask a pupil from the pre-teach group first, since they met these words and ideas before the lesson. Pupils try to recall before you re-explain.
 You studied the Transatlantic Slave Trade in Year 8. You know that Britain abolished slavery across its Empire in 1833, and began using its navy to stop slave ships at sea. The United States did not follow. Slavery carried on there for another thirty years.
-The country split over it. The states in the South refused to end slavery, and argued that their whole economies depended on the tobacco and cotton trade. The states in the North argued that the South had to abolish it, because it was inhumane and against the will of God. Neither side would move.
+The country split over it. Southern states refused to end slavery, and argued that the tobacco and cotton plantations were the whole basis of their wealth. Northern states argued that slavery was inhumane and against the will of God, and that the South had to abolish it. Neither side would move.
 In 1860 Abraham Lincoln was elected President. He had campaigned to stop slavery spreading into new states, and the South read that as the first step towards abolishing it everywhere. In 1861 the United States Civil War began. A civil war is a war fought between people of the same country. Eleven Southern states left the United States and formed a new country, the Confederacy; the states that stayed were called the Union, because they were fighting to put the country back together.
 Worked example — model it step by step, thinking aloud: Explain one reason why the American Civil War began. (1) Make the point in one sentence: one reason the Civil War began was that the North and the South could not agree about slavery. (2) Give the evidence from your lesson: the South said its economy depended on the tobacco and cotton trade, while the North said slavery was inhumane and against the will of God. (3) Explain the link: when Lincoln was elected in 1860 on a promise to stop slavery spreading, the South believed abolition was coming, so eleven states left. (4) Finish by saying what this shows: this shows the war began because a disagreement about slavery had become a disagreement about whether the country could stay together. Answer: Point, evidence, explain: the two halves of the country could not agree about slavery; the South defended it as the base of its economy and the North attacked it as wrong; Lincoln's election in 1860 convinced the South that abolition was next, so eleven states left in 1861..
 Tip: When a question asks why a war began, give one reason and follow it through to the fighting. A list of reasons with no links scores less than one reason explained properly.</a:t>
@@ -864,7 +864,7 @@
             <a:r>
               <a:rPr lang="en-US" dirty="0"/>
               <a:t>Teach — Free in law, not free in life. Say it in your own words, then check understanding with a quick question: ask a pupil from the pre-teach group first, since they met these words and ideas before the lesson. Pupils try to recall before you re-explain.
-Although slavery had been abolished, many white Americans did not treat African Americans equally. The abolition of slavery did not mean that Black people were completely free. They were free to leave a plantation, but not free to vote, to use the same school, or to expect the police and the courts to protect them.
+Abolition changed the law, not the way most white Americans behaved. Ending slavery did not make Black Americans free in any full sense. They were free to leave a plantation, but not free to vote, to use the same school, or to expect the police and the courts to protect them.
 The sharpest proof of that was lynching: a mob killing a person with no trial, usually by hanging. On a hot August night in 1930, a crowd of 15,000 people came into the small town of Marion in Indiana to watch three Black teenagers be killed by a mob for a crime they were only supposed to have committed. The mob pushed into the police station and dragged them out, and the authorities did not stop it. Your lesson asks you to notice where a newspaper chose to print that story, and what that tells you.
 Your lesson also studies the killing of Emmett Till, a Black teenager murdered in the South in the 1950s, and asks what his story shows about how white Americans saw African Americans. The question to carry into the next chapter is the one your teacher puts on the board: had emancipation worked?
 Tip: Hold two ideas at once in this topic: in law, slavery was over; in daily life, Black Americans were still unfree and still unprotected. Good answers say both.</a:t>
@@ -2451,7 +2451,7 @@
               <a:rPr lang="en-US" dirty="0"/>
               <a:t>Teach — Why the United States went to war over slavery. Say it in your own words, then check understanding with a quick question: ask a pupil from the pre-teach group first, since they met these words and ideas before the lesson. Pupils try to recall before you re-explain.
 You studied the Transatlantic Slave Trade in Year 8. You know that Britain abolished slavery across its Empire in 1833, and began using its navy to stop slave ships at sea. The United States did not follow. Slavery carried on there for another thirty years.
-The country split over it. The states in the South refused to end slavery, and argued that their whole economies depended on the tobacco and cotton trade. The states in the North argued that the South had to abolish it, because it was inhumane and against the will of God. Neither side would move.
+The country split over it. Southern states refused to end slavery, and argued that the tobacco and cotton plantations were the whole basis of their wealth. Northern states argued that slavery was inhumane and against the will of God, and that the South had to abolish it. Neither side would move.
 In 1860 Abraham Lincoln was elected President. He had campaigned to stop slavery spreading into new states, and the South read that as the first step towards abolishing it everywhere. In 1861 the United States Civil War began. A civil war is a war fought between people of the same country. Eleven Southern states left the United States and formed a new country, the Confederacy; the states that stayed were called the Union, because they were fighting to put the country back together.
 Worked example — model it step by step, thinking aloud: Explain one reason why the American Civil War began. (1) Make the point in one sentence: one reason the Civil War began was that the North and the South could not agree about slavery. (2) Give the evidence from your lesson: the South said its economy depended on the tobacco and cotton trade, while the North said slavery was inhumane and against the will of God. (3) Explain the link: when Lincoln was elected in 1860 on a promise to stop slavery spreading, the South believed abolition was coming, so eleven states left. (4) Finish by saying what this shows: this shows the war began because a disagreement about slavery had become a disagreement about whether the country could stay together. Answer: Point, evidence, explain: the two halves of the country could not agree about slavery; the South defended it as the base of its economy and the North attacked it as wrong; Lincoln's election in 1860 convinced the South that abolition was next, so eleven states left in 1861..
 Tip: When a question asks why a war began, give one reason and follow it through to the fighting. A list of reasons with no links scores less than one reason explained properly.</a:t>
@@ -2544,7 +2544,7 @@
               <a:rPr lang="en-US" dirty="0"/>
               <a:t>Teach — Why the United States went to war over slavery. Say it in your own words, then check understanding with a quick question: ask a pupil from the pre-teach group first, since they met these words and ideas before the lesson. Pupils try to recall before you re-explain.
 You studied the Transatlantic Slave Trade in Year 8. You know that Britain abolished slavery across its Empire in 1833, and began using its navy to stop slave ships at sea. The United States did not follow. Slavery carried on there for another thirty years.
-The country split over it. The states in the South refused to end slavery, and argued that their whole economies depended on the tobacco and cotton trade. The states in the North argued that the South had to abolish it, because it was inhumane and against the will of God. Neither side would move.
+The country split over it. Southern states refused to end slavery, and argued that the tobacco and cotton plantations were the whole basis of their wealth. Northern states argued that slavery was inhumane and against the will of God, and that the South had to abolish it. Neither side would move.
 In 1860 Abraham Lincoln was elected President. He had campaigned to stop slavery spreading into new states, and the South read that as the first step towards abolishing it everywhere. In 1861 the United States Civil War began. A civil war is a war fought between people of the same country. Eleven Southern states left the United States and formed a new country, the Confederacy; the states that stayed were called the Union, because they were fighting to put the country back together.
 Worked example — model it step by step, thinking aloud: Explain one reason why the American Civil War began. (1) Make the point in one sentence: one reason the Civil War began was that the North and the South could not agree about slavery. (2) Give the evidence from your lesson: the South said its economy depended on the tobacco and cotton trade, while the North said slavery was inhumane and against the will of God. (3) Explain the link: when Lincoln was elected in 1860 on a promise to stop slavery spreading, the South believed abolition was coming, so eleven states left. (4) Finish by saying what this shows: this shows the war began because a disagreement about slavery had become a disagreement about whether the country could stay together. Answer: Point, evidence, explain: the two halves of the country could not agree about slavery; the South defended it as the base of its economy and the North attacked it as wrong; Lincoln's election in 1860 convinced the South that abolition was next, so eleven states left in 1861..
 Tip: When a question asks why a war began, give one reason and follow it through to the fighting. A list of reasons with no links scores less than one reason explained properly.</a:t>
@@ -5723,7 +5723,7 @@
                 <a:ea typeface="Calibri" pitchFamily="34" charset="-122"/>
                 <a:cs typeface="Calibri" pitchFamily="34" charset="-120"/>
               </a:rPr>
-              <a:t>Although slavery had been abolished, many white Americans did not treat African Americans equally.</a:t>
+              <a:t>Abolition changed the law, not the way most white Americans behaved.</a:t>
             </a:r>
             <a:endParaRPr lang="en-US" sz="2000" dirty="0"/>
           </a:p>
@@ -17272,7 +17272,7 @@
                 <a:ea typeface="Calibri" pitchFamily="34" charset="-122"/>
                 <a:cs typeface="Calibri" pitchFamily="34" charset="-120"/>
               </a:rPr>
-              <a:t>The country split over it. The states in the South refused to end slavery, and argued that their whole economies depended on the tobacco and cotton trade.</a:t>
+              <a:t>The country split over it. Southern states refused to end slavery, and argued that the tobacco and cotton plantations were the whole basis of their wealth.</a:t>
             </a:r>
             <a:endParaRPr lang="en-US" sz="1800" dirty="0"/>
           </a:p>
